--- a/catalog/editorial/templates/ed_chart_bar_left_4.pptx
+++ b/catalog/editorial/templates/ed_chart_bar_left_4.pptx
@@ -3776,7 +3776,7 @@
           <a:noFill/>
         </p:spPr>
         <p:txBody>
-          <a:bodyPr wrap="square" lIns="18288" rIns="18288" tIns="13716" bIns="13716">
+          <a:bodyPr wrap="square" anchor="t" lIns="18288" rIns="18288" tIns="13716" bIns="13716">
             <a:noAutofit/>
           </a:bodyPr>
           <a:lstStyle/>
@@ -3831,7 +3831,7 @@
           <a:noFill/>
         </p:spPr>
         <p:txBody>
-          <a:bodyPr wrap="square" lIns="18288" rIns="18288" tIns="13716" bIns="13716">
+          <a:bodyPr wrap="square" anchor="t" lIns="18288" rIns="18288" tIns="13716" bIns="13716">
             <a:noAutofit/>
           </a:bodyPr>
           <a:lstStyle/>
@@ -3886,7 +3886,7 @@
           <a:noFill/>
         </p:spPr>
         <p:txBody>
-          <a:bodyPr wrap="square" lIns="18288" rIns="18288" tIns="13716" bIns="13716">
+          <a:bodyPr wrap="square" anchor="t" lIns="18288" rIns="18288" tIns="13716" bIns="13716">
             <a:noAutofit/>
           </a:bodyPr>
           <a:lstStyle/>
@@ -3985,7 +3985,7 @@
           <a:noFill/>
         </p:spPr>
         <p:txBody>
-          <a:bodyPr wrap="square" lIns="18288" rIns="18288" tIns="13716" bIns="13716">
+          <a:bodyPr wrap="square" anchor="t" lIns="18288" rIns="18288" tIns="13716" bIns="13716">
             <a:noAutofit/>
           </a:bodyPr>
           <a:lstStyle/>
@@ -4040,7 +4040,7 @@
           <a:noFill/>
         </p:spPr>
         <p:txBody>
-          <a:bodyPr wrap="square" lIns="18288" rIns="18288" tIns="13716" bIns="13716">
+          <a:bodyPr wrap="square" anchor="t" lIns="18288" rIns="18288" tIns="13716" bIns="13716">
             <a:noAutofit/>
           </a:bodyPr>
           <a:lstStyle/>
@@ -4095,7 +4095,7 @@
           <a:noFill/>
         </p:spPr>
         <p:txBody>
-          <a:bodyPr wrap="square" lIns="18288" rIns="18288" tIns="13716" bIns="13716">
+          <a:bodyPr wrap="square" anchor="t" lIns="18288" rIns="18288" tIns="13716" bIns="13716">
             <a:noAutofit/>
           </a:bodyPr>
           <a:lstStyle/>
@@ -4168,7 +4168,7 @@
           <a:noFill/>
         </p:spPr>
         <p:txBody>
-          <a:bodyPr wrap="square" lIns="18288" rIns="18288" tIns="13716" bIns="13716">
+          <a:bodyPr wrap="square" anchor="t" lIns="18288" rIns="18288" tIns="13716" bIns="13716">
             <a:noAutofit/>
           </a:bodyPr>
           <a:lstStyle/>
@@ -4223,7 +4223,7 @@
           <a:noFill/>
         </p:spPr>
         <p:txBody>
-          <a:bodyPr wrap="square" lIns="18288" rIns="18288" tIns="13716" bIns="13716">
+          <a:bodyPr wrap="square" anchor="t" lIns="18288" rIns="18288" tIns="13716" bIns="13716">
             <a:noAutofit/>
           </a:bodyPr>
           <a:lstStyle/>
